--- a/02-精益培训/02-培训材料/01-精益意识培训大纲.pptx
+++ b/02-精益培训/02-培训材料/01-精益意识培训大纲.pptx
@@ -3920,7 +3920,7 @@
               </a:spcAft>
             </a:pPr>
             <a:r>
-              <a:t>  5. 认识紧固件行业的精益应用：了解精益生产在金属紧固件制造中的应用价值</a:t>
+              <a:t>  5. 认识制造业的精益应用：了解精益生产在离散制造中的应用价值</a:t>
             </a:r>
             <a:r>
               <a:rPr sz="1500" b="0">
@@ -4150,7 +4150,7 @@
                           </a:solidFill>
                           <a:latin typeface="SimHei"/>
                         </a:rPr>
-                        <a:t>紧固件行业典型表现</a:t>
+                        <a:t>制造业典型表现</a:t>
                       </a:r>
                     </a:p>
                   </a:txBody>
@@ -4582,7 +4582,7 @@
                           </a:solidFill>
                           <a:latin typeface="SimSun"/>
                         </a:rPr>
-                        <a:t>螺纹不良、头部裂纹、尺寸超差、表面缺陷</a:t>
+                        <a:t>尺寸不良、表面裂纹、尺寸超差、表面缺陷</a:t>
                       </a:r>
                     </a:p>
                   </a:txBody>
@@ -4771,7 +4771,7 @@
               </a:spcAft>
             </a:pPr>
             <a:r>
-              <a:t>  认识精益思维在紧固件行业中的价值</a:t>
+              <a:t>  认识精益思维在制造业中的价值</a:t>
             </a:r>
             <a:r>
               <a:rPr sz="1500" b="0">
@@ -5049,7 +5049,7 @@
               </a:spcAft>
             </a:pPr>
             <a:r>
-              <a:t>1.3 紧固件行业的精益趋势（30分钟）</a:t>
+              <a:t>1.3 制造业的精益趋势（30分钟）</a:t>
             </a:r>
             <a:r>
               <a:rPr sz="1600" b="0">
@@ -5068,45 +5068,45 @@
               </a:spcAft>
             </a:pPr>
             <a:r>
-              <a:t>  金属紧固件制造的行业现状和挑战</a:t>
-            </a:r>
-            <a:r>
-              <a:rPr sz="1500" b="0">
-                <a:solidFill>
-                  <a:srgbClr val="333333"/>
-                </a:solidFill>
-                <a:latin typeface="SimSun"/>
-              </a:rPr>
-              <a:t/>
-            </a:r>
-          </a:p>
-          <a:p>
-            <a:pPr>
-              <a:spcAft>
-                <a:spcPts val="400"/>
-              </a:spcAft>
-            </a:pPr>
-            <a:r>
-              <a:t>  精益生产在紧固件行业的应用前景</a:t>
-            </a:r>
-            <a:r>
-              <a:rPr sz="1500" b="0">
-                <a:solidFill>
-                  <a:srgbClr val="333333"/>
-                </a:solidFill>
-                <a:latin typeface="SimSun"/>
-              </a:rPr>
-              <a:t/>
-            </a:r>
-          </a:p>
-          <a:p>
-            <a:pPr>
-              <a:spcAft>
-                <a:spcPts val="400"/>
-              </a:spcAft>
-            </a:pPr>
-            <a:r>
-              <a:t>  国内外紧固件企业精益转型案例概览</a:t>
+              <a:t>  离散制造的行业现状和挑战</a:t>
+            </a:r>
+            <a:r>
+              <a:rPr sz="1500" b="0">
+                <a:solidFill>
+                  <a:srgbClr val="333333"/>
+                </a:solidFill>
+                <a:latin typeface="SimSun"/>
+              </a:rPr>
+              <a:t/>
+            </a:r>
+          </a:p>
+          <a:p>
+            <a:pPr>
+              <a:spcAft>
+                <a:spcPts val="400"/>
+              </a:spcAft>
+            </a:pPr>
+            <a:r>
+              <a:t>  精益生产在制造业的应用前景</a:t>
+            </a:r>
+            <a:r>
+              <a:rPr sz="1500" b="0">
+                <a:solidFill>
+                  <a:srgbClr val="333333"/>
+                </a:solidFill>
+                <a:latin typeface="SimSun"/>
+              </a:rPr>
+              <a:t/>
+            </a:r>
+          </a:p>
+          <a:p>
+            <a:pPr>
+              <a:spcAft>
+                <a:spcPts val="400"/>
+              </a:spcAft>
+            </a:pPr>
+            <a:r>
+              <a:t>  国内外制造企业精益转型案例概览</a:t>
             </a:r>
             <a:r>
               <a:rPr sz="1500" b="0">
@@ -5264,7 +5264,7 @@
               </a:spcAft>
             </a:pPr>
             <a:r>
-              <a:t>  紧固件行业精益案例PPT</a:t>
+              <a:t>  制造业精益案例PPT</a:t>
             </a:r>
             <a:r>
               <a:rPr sz="1500" b="0">
@@ -5646,7 +5646,7 @@
               </a:spcAft>
             </a:pPr>
             <a:r>
-              <a:t>  案例讲解：每种浪费配合2-3个紧固件行业实例</a:t>
+              <a:t>  案例讲解：每种浪费配合2-3个制造业实例</a:t>
             </a:r>
             <a:r>
               <a:rPr sz="1500" b="0">
@@ -5927,7 +5927,7 @@
               </a:spcAft>
             </a:pPr>
             <a:r>
-              <a:t>  紧固件车间案例：模具架整理、工具柜整理</a:t>
+              <a:t>  产品车间案例：模具架整理、工具柜整理</a:t>
             </a:r>
             <a:r>
               <a:rPr sz="1500" b="0">
@@ -6025,7 +6025,7 @@
               </a:spcAft>
             </a:pPr>
             <a:r>
-              <a:t>  紧固件车间案例：工具定置管理、物料定置管理</a:t>
+              <a:t>  产品车间案例：工具定置管理、物料定置管理</a:t>
             </a:r>
             <a:r>
               <a:rPr sz="1500" b="0">
@@ -6123,7 +6123,7 @@
               </a:spcAft>
             </a:pPr>
             <a:r>
-              <a:t>  紧固件车间案例：设备清扫点检标准</a:t>
+              <a:t>  产品车间案例：设备清扫点检标准</a:t>
             </a:r>
             <a:r>
               <a:rPr sz="1500" b="0">
@@ -6221,7 +6221,7 @@
               </a:spcAft>
             </a:pPr>
             <a:r>
-              <a:t>  紧固件车间案例：5S检查标准和评分方法</a:t>
+              <a:t>  产品车间案例：5S检查标准和评分方法</a:t>
             </a:r>
             <a:r>
               <a:rPr sz="1500" b="0">
@@ -6474,7 +6474,7 @@
               </a:spcAft>
             </a:pPr>
             <a:r>
-              <a:t>  紧固件车间可视化管理实例</a:t>
+              <a:t>  产品车间可视化管理实例</a:t>
             </a:r>
             <a:r>
               <a:rPr sz="1500" b="0">
@@ -6594,7 +6594,7 @@
               </a:spcAft>
             </a:pPr>
             <a:r>
-              <a:t>  图片对比：5S实施前后的紧固件车间</a:t>
+              <a:t>  图片对比：5S实施前后的产品车间</a:t>
             </a:r>
             <a:r>
               <a:rPr sz="1500" b="0">
@@ -7027,26 +7027,26 @@
               </a:spcAft>
             </a:pPr>
             <a:r>
-              <a:t>  PDCA在紧固件生产中的应用案例</a:t>
-            </a:r>
-            <a:r>
-              <a:rPr sz="1500" b="0">
-                <a:solidFill>
-                  <a:srgbClr val="333333"/>
-                </a:solidFill>
-                <a:latin typeface="SimSun"/>
-              </a:rPr>
-              <a:t/>
-            </a:r>
-          </a:p>
-          <a:p>
-            <a:pPr>
-              <a:spcAft>
-                <a:spcPts val="400"/>
-              </a:spcAft>
-            </a:pPr>
-            <a:r>
-              <a:t>  案例：某紧固件企业通过PDCA将螺纹不良率从3%降至0.5%</a:t>
+              <a:t>  PDCA在产品生产中的应用案例</a:t>
+            </a:r>
+            <a:r>
+              <a:rPr sz="1500" b="0">
+                <a:solidFill>
+                  <a:srgbClr val="333333"/>
+                </a:solidFill>
+                <a:latin typeface="SimSun"/>
+              </a:rPr>
+              <a:t/>
+            </a:r>
+          </a:p>
+          <a:p>
+            <a:pPr>
+              <a:spcAft>
+                <a:spcPts val="400"/>
+              </a:spcAft>
+            </a:pPr>
+            <a:r>
+              <a:t>  案例：某制造企业通过PDCA将尺寸不良率从3%降至0.5%</a:t>
             </a:r>
             <a:r>
               <a:rPr sz="1500" b="0">
@@ -7321,7 +7321,7 @@
               </a:spcAft>
             </a:pPr>
             <a:r>
-              <a:t>  案例分享：紧固件企业持续改善成功案例</a:t>
+              <a:t>  案例分享：制造企业持续改善成功案例</a:t>
             </a:r>
             <a:r>
               <a:rPr sz="1500" b="0">
@@ -7732,7 +7732,7 @@
                           </a:solidFill>
                           <a:latin typeface="SimSun"/>
                         </a:rPr>
-                        <a:t>紧固件行业真实案例</a:t>
+                        <a:t>制造业真实案例</a:t>
                       </a:r>
                     </a:p>
                   </a:txBody>
@@ -8940,7 +8940,7 @@
               </a:spcAft>
             </a:pPr>
             <a:r>
-              <a:t>  《紧固件行业精益案例集》（内部编制）</a:t>
+              <a:t>  《制造业精益案例集》（内部编制）</a:t>
             </a:r>
             <a:r>
               <a:rPr sz="1500" b="0">
